--- a/assets/powerpoints/module-n2-panier/A2-le-son-s-et-le-son-z.pptx
+++ b/assets/powerpoints/module-n2-panier/A2-le-son-s-et-le-son-z.pptx
@@ -7991,7 +7991,25 @@
                 </a:solidFill>
                 <a:latin typeface="Verdana"/>
               </a:rPr>
-              <a:t>une ceri&lt;b&gt;s&lt;/b&gt;e</a:t>
+              <a:t>une ceri</a:t>
+            </a:r>
+            <a:r>
+              <a:rPr sz="1800" b="1" i="0">
+                <a:solidFill>
+                  <a:srgbClr val="3A3D40"/>
+                </a:solidFill>
+                <a:latin typeface="Verdana"/>
+              </a:rPr>
+              <a:t>s</a:t>
+            </a:r>
+            <a:r>
+              <a:rPr sz="1800" b="0" i="0">
+                <a:solidFill>
+                  <a:srgbClr val="3A3D40"/>
+                </a:solidFill>
+                <a:latin typeface="Verdana"/>
+              </a:rPr>
+              <a:t>e</a:t>
             </a:r>
           </a:p>
         </p:txBody>
@@ -8111,7 +8129,25 @@
                 </a:solidFill>
                 <a:latin typeface="Verdana"/>
               </a:rPr>
-              <a:t>du rai&lt;b&gt;s&lt;/b&gt;in</a:t>
+              <a:t>du rai</a:t>
+            </a:r>
+            <a:r>
+              <a:rPr sz="1800" b="1" i="0">
+                <a:solidFill>
+                  <a:srgbClr val="3A3D40"/>
+                </a:solidFill>
+                <a:latin typeface="Verdana"/>
+              </a:rPr>
+              <a:t>s</a:t>
+            </a:r>
+            <a:r>
+              <a:rPr sz="1800" b="0" i="0">
+                <a:solidFill>
+                  <a:srgbClr val="3A3D40"/>
+                </a:solidFill>
+                <a:latin typeface="Verdana"/>
+              </a:rPr>
+              <a:t>in</a:t>
             </a:r>
           </a:p>
         </p:txBody>
@@ -8231,7 +8267,25 @@
                 </a:solidFill>
                 <a:latin typeface="Verdana"/>
               </a:rPr>
-              <a:t>une sauci&lt;b&gt;ss&lt;/b&gt;e</a:t>
+              <a:t>une sauci</a:t>
+            </a:r>
+            <a:r>
+              <a:rPr sz="1800" b="1" i="0">
+                <a:solidFill>
+                  <a:srgbClr val="3A3D40"/>
+                </a:solidFill>
+                <a:latin typeface="Verdana"/>
+              </a:rPr>
+              <a:t>ss</a:t>
+            </a:r>
+            <a:r>
+              <a:rPr sz="1800" b="0" i="0">
+                <a:solidFill>
+                  <a:srgbClr val="3A3D40"/>
+                </a:solidFill>
+                <a:latin typeface="Verdana"/>
+              </a:rPr>
+              <a:t>e</a:t>
             </a:r>
           </a:p>
         </p:txBody>
@@ -8345,13 +8399,22 @@
               </a:lnSpc>
             </a:pPr>
             <a:r>
+              <a:rPr sz="1800" b="1" i="0">
+                <a:solidFill>
+                  <a:srgbClr val="3A3D40"/>
+                </a:solidFill>
+                <a:latin typeface="Verdana"/>
+              </a:rPr>
+              <a:t>s</a:t>
+            </a:r>
+            <a:r>
               <a:rPr sz="1800" b="0" i="0">
                 <a:solidFill>
                   <a:srgbClr val="3A3D40"/>
                 </a:solidFill>
                 <a:latin typeface="Verdana"/>
               </a:rPr>
-              <a:t>&lt;b&gt;s&lt;/b&gt;alade</a:t>
+              <a:t>alade</a:t>
             </a:r>
           </a:p>
         </p:txBody>
@@ -8822,7 +8885,133 @@
                 </a:solidFill>
                 <a:latin typeface="Verdana"/>
               </a:rPr>
-              <a:t>ceri&lt;b&gt;s&lt;/b&gt;e, rai&lt;b&gt;s&lt;/b&gt;in, framboi&lt;b&gt;s&lt;/b&gt;e. Pour garder le son dur entre deux voyelles, le français écrit &lt;b&gt;deux s&lt;/b&gt; : sauci&lt;b&gt;ss&lt;/b&gt;e, de&lt;b&gt;ss&lt;/b&gt;ert, poi&lt;b&gt;ss&lt;/b&gt;on.</a:t>
+              <a:t>ceri</a:t>
+            </a:r>
+            <a:r>
+              <a:rPr sz="2000" b="1" i="0">
+                <a:solidFill>
+                  <a:srgbClr val="4B4F52"/>
+                </a:solidFill>
+                <a:latin typeface="Verdana"/>
+              </a:rPr>
+              <a:t>s</a:t>
+            </a:r>
+            <a:r>
+              <a:rPr sz="2000" b="0" i="0">
+                <a:solidFill>
+                  <a:srgbClr val="4B4F52"/>
+                </a:solidFill>
+                <a:latin typeface="Verdana"/>
+              </a:rPr>
+              <a:t>e, rai</a:t>
+            </a:r>
+            <a:r>
+              <a:rPr sz="2000" b="1" i="0">
+                <a:solidFill>
+                  <a:srgbClr val="4B4F52"/>
+                </a:solidFill>
+                <a:latin typeface="Verdana"/>
+              </a:rPr>
+              <a:t>s</a:t>
+            </a:r>
+            <a:r>
+              <a:rPr sz="2000" b="0" i="0">
+                <a:solidFill>
+                  <a:srgbClr val="4B4F52"/>
+                </a:solidFill>
+                <a:latin typeface="Verdana"/>
+              </a:rPr>
+              <a:t>in, framboi</a:t>
+            </a:r>
+            <a:r>
+              <a:rPr sz="2000" b="1" i="0">
+                <a:solidFill>
+                  <a:srgbClr val="4B4F52"/>
+                </a:solidFill>
+                <a:latin typeface="Verdana"/>
+              </a:rPr>
+              <a:t>s</a:t>
+            </a:r>
+            <a:r>
+              <a:rPr sz="2000" b="0" i="0">
+                <a:solidFill>
+                  <a:srgbClr val="4B4F52"/>
+                </a:solidFill>
+                <a:latin typeface="Verdana"/>
+              </a:rPr>
+              <a:t>e. Pour garder le son dur entre deux voyelles, le français écrit </a:t>
+            </a:r>
+            <a:r>
+              <a:rPr sz="2000" b="1" i="0">
+                <a:solidFill>
+                  <a:srgbClr val="4B4F52"/>
+                </a:solidFill>
+                <a:latin typeface="Verdana"/>
+              </a:rPr>
+              <a:t>deux s</a:t>
+            </a:r>
+            <a:r>
+              <a:rPr sz="2000" b="0" i="0">
+                <a:solidFill>
+                  <a:srgbClr val="4B4F52"/>
+                </a:solidFill>
+                <a:latin typeface="Verdana"/>
+              </a:rPr>
+              <a:t> : sauci</a:t>
+            </a:r>
+            <a:r>
+              <a:rPr sz="2000" b="1" i="0">
+                <a:solidFill>
+                  <a:srgbClr val="4B4F52"/>
+                </a:solidFill>
+                <a:latin typeface="Verdana"/>
+              </a:rPr>
+              <a:t>ss</a:t>
+            </a:r>
+            <a:r>
+              <a:rPr sz="2000" b="0" i="0">
+                <a:solidFill>
+                  <a:srgbClr val="4B4F52"/>
+                </a:solidFill>
+                <a:latin typeface="Verdana"/>
+              </a:rPr>
+              <a:t>e, de</a:t>
+            </a:r>
+            <a:r>
+              <a:rPr sz="2000" b="1" i="0">
+                <a:solidFill>
+                  <a:srgbClr val="4B4F52"/>
+                </a:solidFill>
+                <a:latin typeface="Verdana"/>
+              </a:rPr>
+              <a:t>ss</a:t>
+            </a:r>
+            <a:r>
+              <a:rPr sz="2000" b="0" i="0">
+                <a:solidFill>
+                  <a:srgbClr val="4B4F52"/>
+                </a:solidFill>
+                <a:latin typeface="Verdana"/>
+              </a:rPr>
+              <a:t>ert, poi</a:t>
+            </a:r>
+            <a:r>
+              <a:rPr sz="2000" b="1" i="0">
+                <a:solidFill>
+                  <a:srgbClr val="4B4F52"/>
+                </a:solidFill>
+                <a:latin typeface="Verdana"/>
+              </a:rPr>
+              <a:t>ss</a:t>
+            </a:r>
+            <a:r>
+              <a:rPr sz="2000" b="0" i="0">
+                <a:solidFill>
+                  <a:srgbClr val="4B4F52"/>
+                </a:solidFill>
+                <a:latin typeface="Verdana"/>
+              </a:rPr>
+              <a:t>on.</a:t>
             </a:r>
           </a:p>
         </p:txBody>
